--- a/public/fun/cards/public/명함_공무원_35_라이트카키.pptx
+++ b/public/fun/cards/public/명함_공무원_35_라이트카키.pptx
@@ -3852,7 +3852,7 @@
                 <a:latin typeface="맑은 고딕"/>
                 <a:ea typeface="맑은 고딕"/>
               </a:rPr>
-              <a:t>노인 복지</a:t>
+              <a:t>생활 복지</a:t>
             </a:r>
           </a:p>
         </p:txBody>

--- a/public/fun/cards/public/명함_공무원_35_라이트카키.pptx
+++ b/public/fun/cards/public/명함_공무원_35_라이트카키.pptx
@@ -3852,7 +3852,7 @@
                 <a:latin typeface="맑은 고딕"/>
                 <a:ea typeface="맑은 고딕"/>
               </a:rPr>
-              <a:t>생활 복지</a:t>
+              <a:t>노인 복지</a:t>
             </a:r>
           </a:p>
         </p:txBody>
